--- a/2024/2024-06-28-AI-Updates.pptx
+++ b/2024/2024-06-28-AI-Updates.pptx
@@ -973,7 +973,7 @@
   <p:cSld>
     <p:spTree>
       <p:nvGrpSpPr>
-        <p:cNvPr id="1" name="Shape 182"/>
+        <p:cNvPr id="1" name="Shape 183"/>
         <p:cNvGrpSpPr/>
         <p:nvPr/>
       </p:nvGrpSpPr>
@@ -987,7 +987,7 @@
       </p:grpSpPr>
       <p:sp>
         <p:nvSpPr>
-          <p:cNvPr id="183" name="Google Shape;183;g2e8a450c44d_0_239:notes"/>
+          <p:cNvPr id="184" name="Google Shape;184;g2e8a450c44d_0_239:notes"/>
           <p:cNvSpPr>
             <a:spLocks noGrp="1" noRot="1" noChangeAspect="1"/>
           </p:cNvSpPr>
@@ -1038,7 +1038,7 @@
       </p:sp>
       <p:sp>
         <p:nvSpPr>
-          <p:cNvPr id="184" name="Google Shape;184;g2e8a450c44d_0_239:notes"/>
+          <p:cNvPr id="185" name="Google Shape;185;g2e8a450c44d_0_239:notes"/>
           <p:cNvSpPr txBox="1">
             <a:spLocks noGrp="1"/>
           </p:cNvSpPr>
@@ -1095,7 +1095,7 @@
   <p:cSld>
     <p:spTree>
       <p:nvGrpSpPr>
-        <p:cNvPr id="1" name="Shape 189"/>
+        <p:cNvPr id="1" name="Shape 191"/>
         <p:cNvGrpSpPr/>
         <p:nvPr/>
       </p:nvGrpSpPr>
@@ -1109,7 +1109,7 @@
       </p:grpSpPr>
       <p:sp>
         <p:nvSpPr>
-          <p:cNvPr id="190" name="Google Shape;190;g2e8a450c44d_0_260:notes"/>
+          <p:cNvPr id="192" name="Google Shape;192;g2e8a450c44d_0_260:notes"/>
           <p:cNvSpPr>
             <a:spLocks noGrp="1" noRot="1" noChangeAspect="1"/>
           </p:cNvSpPr>
@@ -1160,7 +1160,7 @@
       </p:sp>
       <p:sp>
         <p:nvSpPr>
-          <p:cNvPr id="191" name="Google Shape;191;g2e8a450c44d_0_260:notes"/>
+          <p:cNvPr id="193" name="Google Shape;193;g2e8a450c44d_0_260:notes"/>
           <p:cNvSpPr txBox="1">
             <a:spLocks noGrp="1"/>
           </p:cNvSpPr>
@@ -1217,7 +1217,7 @@
   <p:cSld>
     <p:spTree>
       <p:nvGrpSpPr>
-        <p:cNvPr id="1" name="Shape 197"/>
+        <p:cNvPr id="1" name="Shape 199"/>
         <p:cNvGrpSpPr/>
         <p:nvPr/>
       </p:nvGrpSpPr>
@@ -1231,7 +1231,7 @@
       </p:grpSpPr>
       <p:sp>
         <p:nvSpPr>
-          <p:cNvPr id="198" name="Google Shape;198;g2e7737a56fa_0_0:notes"/>
+          <p:cNvPr id="200" name="Google Shape;200;g2e7737a56fa_0_0:notes"/>
           <p:cNvSpPr>
             <a:spLocks noGrp="1" noRot="1" noChangeAspect="1"/>
           </p:cNvSpPr>
@@ -1282,7 +1282,7 @@
       </p:sp>
       <p:sp>
         <p:nvSpPr>
-          <p:cNvPr id="199" name="Google Shape;199;g2e7737a56fa_0_0:notes"/>
+          <p:cNvPr id="201" name="Google Shape;201;g2e7737a56fa_0_0:notes"/>
           <p:cNvSpPr txBox="1">
             <a:spLocks noGrp="1"/>
           </p:cNvSpPr>
@@ -1339,7 +1339,7 @@
   <p:cSld>
     <p:spTree>
       <p:nvGrpSpPr>
-        <p:cNvPr id="1" name="Shape 206"/>
+        <p:cNvPr id="1" name="Shape 208"/>
         <p:cNvGrpSpPr/>
         <p:nvPr/>
       </p:nvGrpSpPr>
@@ -1353,7 +1353,7 @@
       </p:grpSpPr>
       <p:sp>
         <p:nvSpPr>
-          <p:cNvPr id="207" name="Google Shape;207;p21:notes"/>
+          <p:cNvPr id="209" name="Google Shape;209;p21:notes"/>
           <p:cNvSpPr>
             <a:spLocks noGrp="1" noRot="1" noChangeAspect="1"/>
           </p:cNvSpPr>
@@ -1404,7 +1404,7 @@
       </p:sp>
       <p:sp>
         <p:nvSpPr>
-          <p:cNvPr id="208" name="Google Shape;208;p21:notes"/>
+          <p:cNvPr id="210" name="Google Shape;210;p21:notes"/>
           <p:cNvSpPr txBox="1">
             <a:spLocks noGrp="1"/>
           </p:cNvSpPr>
@@ -1461,7 +1461,7 @@
   <p:cSld>
     <p:spTree>
       <p:nvGrpSpPr>
-        <p:cNvPr id="1" name="Shape 216"/>
+        <p:cNvPr id="1" name="Shape 218"/>
         <p:cNvGrpSpPr/>
         <p:nvPr/>
       </p:nvGrpSpPr>
@@ -1475,7 +1475,7 @@
       </p:grpSpPr>
       <p:sp>
         <p:nvSpPr>
-          <p:cNvPr id="217" name="Google Shape;217;p22:notes"/>
+          <p:cNvPr id="219" name="Google Shape;219;p22:notes"/>
           <p:cNvSpPr>
             <a:spLocks noGrp="1" noRot="1" noChangeAspect="1"/>
           </p:cNvSpPr>
@@ -1526,7 +1526,7 @@
       </p:sp>
       <p:sp>
         <p:nvSpPr>
-          <p:cNvPr id="218" name="Google Shape;218;p22:notes"/>
+          <p:cNvPr id="220" name="Google Shape;220;p22:notes"/>
           <p:cNvSpPr txBox="1">
             <a:spLocks noGrp="1"/>
           </p:cNvSpPr>
@@ -1583,7 +1583,7 @@
   <p:cSld>
     <p:spTree>
       <p:nvGrpSpPr>
-        <p:cNvPr id="1" name="Shape 226"/>
+        <p:cNvPr id="1" name="Shape 228"/>
         <p:cNvGrpSpPr/>
         <p:nvPr/>
       </p:nvGrpSpPr>
@@ -1597,7 +1597,7 @@
       </p:grpSpPr>
       <p:sp>
         <p:nvSpPr>
-          <p:cNvPr id="227" name="Google Shape;227;p23:notes"/>
+          <p:cNvPr id="229" name="Google Shape;229;p23:notes"/>
           <p:cNvSpPr>
             <a:spLocks noGrp="1" noRot="1" noChangeAspect="1"/>
           </p:cNvSpPr>
@@ -1648,7 +1648,7 @@
       </p:sp>
       <p:sp>
         <p:nvSpPr>
-          <p:cNvPr id="228" name="Google Shape;228;p23:notes"/>
+          <p:cNvPr id="230" name="Google Shape;230;p23:notes"/>
           <p:cNvSpPr txBox="1">
             <a:spLocks noGrp="1"/>
           </p:cNvSpPr>
@@ -2559,7 +2559,7 @@
   <p:cSld>
     <p:spTree>
       <p:nvGrpSpPr>
-        <p:cNvPr id="1" name="Shape 169"/>
+        <p:cNvPr id="1" name="Shape 170"/>
         <p:cNvGrpSpPr/>
         <p:nvPr/>
       </p:nvGrpSpPr>
@@ -2573,7 +2573,7 @@
       </p:grpSpPr>
       <p:sp>
         <p:nvSpPr>
-          <p:cNvPr id="170" name="Google Shape;170;g2e8a450c44d_0_106:notes"/>
+          <p:cNvPr id="171" name="Google Shape;171;g2e8a450c44d_0_106:notes"/>
           <p:cNvSpPr>
             <a:spLocks noGrp="1" noRot="1" noChangeAspect="1"/>
           </p:cNvSpPr>
@@ -2624,7 +2624,7 @@
       </p:sp>
       <p:sp>
         <p:nvSpPr>
-          <p:cNvPr id="171" name="Google Shape;171;g2e8a450c44d_0_106:notes"/>
+          <p:cNvPr id="172" name="Google Shape;172;g2e8a450c44d_0_106:notes"/>
           <p:cNvSpPr txBox="1">
             <a:spLocks noGrp="1"/>
           </p:cNvSpPr>
@@ -10736,8 +10736,8 @@
         </p:nvSpPr>
         <p:spPr>
           <a:xfrm>
-            <a:off x="83860" y="1132325"/>
-            <a:ext cx="4420200" cy="3879000"/>
+            <a:off x="83860" y="979925"/>
+            <a:ext cx="4420200" cy="4109700"/>
           </a:xfrm>
           <a:prstGeom prst="rect">
             <a:avLst/>
@@ -11398,6 +11398,46 @@
               <a:sym typeface="Calibri"/>
             </a:endParaRPr>
           </a:p>
+          <a:p>
+            <a:pPr marL="228600" marR="0" lvl="0" indent="-209550" algn="l" rtl="0">
+              <a:lnSpc>
+                <a:spcPct val="100000"/>
+              </a:lnSpc>
+              <a:spcBef>
+                <a:spcPts val="0"/>
+              </a:spcBef>
+              <a:spcAft>
+                <a:spcPts val="0"/>
+              </a:spcAft>
+              <a:buClr>
+                <a:srgbClr val="3C78D8"/>
+              </a:buClr>
+              <a:buSzPts val="1500"/>
+              <a:buFont typeface="Calibri"/>
+              <a:buChar char="●"/>
+            </a:pPr>
+            <a:r>
+              <a:rPr lang="en" sz="1500" b="1">
+                <a:solidFill>
+                  <a:srgbClr val="3C78D8"/>
+                </a:solidFill>
+                <a:latin typeface="Calibri"/>
+                <a:ea typeface="Calibri"/>
+                <a:cs typeface="Calibri"/>
+                <a:sym typeface="Calibri"/>
+              </a:rPr>
+              <a:t>Google Vertex for Enterprise</a:t>
+            </a:r>
+            <a:endParaRPr sz="1500" b="1">
+              <a:solidFill>
+                <a:srgbClr val="3C78D8"/>
+              </a:solidFill>
+              <a:latin typeface="Calibri"/>
+              <a:ea typeface="Calibri"/>
+              <a:cs typeface="Calibri"/>
+              <a:sym typeface="Calibri"/>
+            </a:endParaRPr>
+          </a:p>
         </p:txBody>
       </p:sp>
       <p:sp>
@@ -11408,8 +11448,8 @@
         </p:nvSpPr>
         <p:spPr>
           <a:xfrm>
-            <a:off x="4633738" y="1132319"/>
-            <a:ext cx="4420200" cy="3648000"/>
+            <a:off x="4633738" y="979919"/>
+            <a:ext cx="4420200" cy="4109700"/>
           </a:xfrm>
           <a:prstGeom prst="rect">
             <a:avLst/>
@@ -11458,7 +11498,7 @@
                 <a:cs typeface="Calibri"/>
                 <a:sym typeface="Calibri"/>
               </a:rPr>
-              <a:t>Google Vertex for Enterprise</a:t>
+              <a:t>Amazon Metis powered by Olympus</a:t>
             </a:r>
             <a:endParaRPr sz="1500" b="1">
               <a:solidFill>
@@ -11498,7 +11538,7 @@
                 <a:cs typeface="Calibri"/>
                 <a:sym typeface="Calibri"/>
               </a:rPr>
-              <a:t>Amazon Metis powered by Olympus</a:t>
+              <a:t>OpenAI ChatGPT on MacOS</a:t>
             </a:r>
             <a:endParaRPr sz="1500" b="1">
               <a:solidFill>
@@ -11538,7 +11578,7 @@
                 <a:cs typeface="Calibri"/>
                 <a:sym typeface="Calibri"/>
               </a:rPr>
-              <a:t>OpenAI ChatGPT on MacOS</a:t>
+              <a:t>75% of workers using AI</a:t>
             </a:r>
             <a:endParaRPr sz="1500" b="1">
               <a:solidFill>
@@ -11578,7 +11618,7 @@
                 <a:cs typeface="Calibri"/>
                 <a:sym typeface="Calibri"/>
               </a:rPr>
-              <a:t>75% of workers using AI</a:t>
+              <a:t>RAG fine-tuning </a:t>
             </a:r>
             <a:endParaRPr sz="1500" b="1">
               <a:solidFill>
@@ -11618,7 +11658,7 @@
                 <a:cs typeface="Calibri"/>
                 <a:sym typeface="Calibri"/>
               </a:rPr>
-              <a:t>RAG fine-tuning </a:t>
+              <a:t>Multiple ways to extend context length</a:t>
             </a:r>
             <a:endParaRPr sz="1500" b="1">
               <a:solidFill>
@@ -11658,7 +11698,7 @@
                 <a:cs typeface="Calibri"/>
                 <a:sym typeface="Calibri"/>
               </a:rPr>
-              <a:t>Multiple ways to extend context length</a:t>
+              <a:t>A 240T tokens dataset </a:t>
             </a:r>
             <a:endParaRPr sz="1500" b="1">
               <a:solidFill>
@@ -11698,7 +11738,7 @@
                 <a:cs typeface="Calibri"/>
                 <a:sym typeface="Calibri"/>
               </a:rPr>
-              <a:t>A 240T tokens dataset </a:t>
+              <a:t>Andrej Karpathy LLM101n Storyteller AI course</a:t>
             </a:r>
             <a:endParaRPr sz="1500" b="1">
               <a:solidFill>
@@ -11738,7 +11778,7 @@
                 <a:cs typeface="Calibri"/>
                 <a:sym typeface="Calibri"/>
               </a:rPr>
-              <a:t>Andrej Karpathy LLM101n Storyteller AI course</a:t>
+              <a:t>Chrome Canary can run Gemini locally</a:t>
             </a:r>
             <a:endParaRPr sz="1500" b="1">
               <a:solidFill>
@@ -11778,7 +11818,7 @@
                 <a:cs typeface="Calibri"/>
                 <a:sym typeface="Calibri"/>
               </a:rPr>
-              <a:t>Chrome Canary can run Gemini locally</a:t>
+              <a:t>GPT-5 in 2025-2026 </a:t>
             </a:r>
             <a:endParaRPr sz="1500" b="1">
               <a:solidFill>
@@ -11818,7 +11858,7 @@
                 <a:cs typeface="Calibri"/>
                 <a:sym typeface="Calibri"/>
               </a:rPr>
-              <a:t>AMD MI300X GPU beats H100</a:t>
+              <a:t>Small Language Models (SML) - on-device</a:t>
             </a:r>
             <a:endParaRPr sz="1500" b="1">
               <a:solidFill>
@@ -11858,7 +11898,7 @@
                 <a:cs typeface="Calibri"/>
                 <a:sym typeface="Calibri"/>
               </a:rPr>
-              <a:t>pdfplumber - extract tables from PDFs </a:t>
+              <a:t>AMD MI300X GPU beats H100</a:t>
             </a:r>
             <a:endParaRPr sz="1500" b="1">
               <a:solidFill>
@@ -11898,7 +11938,87 @@
                 <a:cs typeface="Calibri"/>
                 <a:sym typeface="Calibri"/>
               </a:rPr>
+              <a:t>pdfplumber - extract tables from PDFs </a:t>
+            </a:r>
+            <a:endParaRPr sz="1500" b="1">
+              <a:solidFill>
+                <a:srgbClr val="3C78D8"/>
+              </a:solidFill>
+              <a:latin typeface="Calibri"/>
+              <a:ea typeface="Calibri"/>
+              <a:cs typeface="Calibri"/>
+              <a:sym typeface="Calibri"/>
+            </a:endParaRPr>
+          </a:p>
+          <a:p>
+            <a:pPr marL="228600" marR="0" lvl="0" indent="-209550" algn="l" rtl="0">
+              <a:lnSpc>
+                <a:spcPct val="100000"/>
+              </a:lnSpc>
+              <a:spcBef>
+                <a:spcPts val="0"/>
+              </a:spcBef>
+              <a:spcAft>
+                <a:spcPts val="0"/>
+              </a:spcAft>
+              <a:buClr>
+                <a:srgbClr val="3C78D8"/>
+              </a:buClr>
+              <a:buSzPts val="1500"/>
+              <a:buFont typeface="Calibri"/>
+              <a:buChar char="●"/>
+            </a:pPr>
+            <a:r>
+              <a:rPr lang="en" sz="1500" b="1">
+                <a:solidFill>
+                  <a:srgbClr val="3C78D8"/>
+                </a:solidFill>
+                <a:latin typeface="Calibri"/>
+                <a:ea typeface="Calibri"/>
+                <a:cs typeface="Calibri"/>
+                <a:sym typeface="Calibri"/>
+              </a:rPr>
               <a:t>ParaLLM: 1600+ tok/s on a MacBook</a:t>
+            </a:r>
+            <a:endParaRPr sz="1500" b="1">
+              <a:solidFill>
+                <a:srgbClr val="3C78D8"/>
+              </a:solidFill>
+              <a:latin typeface="Calibri"/>
+              <a:ea typeface="Calibri"/>
+              <a:cs typeface="Calibri"/>
+              <a:sym typeface="Calibri"/>
+            </a:endParaRPr>
+          </a:p>
+          <a:p>
+            <a:pPr marL="228600" marR="0" lvl="0" indent="-209550" algn="l" rtl="0">
+              <a:lnSpc>
+                <a:spcPct val="100000"/>
+              </a:lnSpc>
+              <a:spcBef>
+                <a:spcPts val="0"/>
+              </a:spcBef>
+              <a:spcAft>
+                <a:spcPts val="0"/>
+              </a:spcAft>
+              <a:buClr>
+                <a:srgbClr val="3C78D8"/>
+              </a:buClr>
+              <a:buSzPts val="1500"/>
+              <a:buFont typeface="Calibri"/>
+              <a:buChar char="●"/>
+            </a:pPr>
+            <a:r>
+              <a:rPr lang="en" sz="1500" b="1">
+                <a:solidFill>
+                  <a:srgbClr val="3C78D8"/>
+                </a:solidFill>
+                <a:latin typeface="Calibri"/>
+                <a:ea typeface="Calibri"/>
+                <a:cs typeface="Calibri"/>
+                <a:sym typeface="Calibri"/>
+              </a:rPr>
+              <a:t>Don't use LangChain</a:t>
             </a:r>
             <a:endParaRPr sz="1500" b="1">
               <a:solidFill>
@@ -12040,7 +12160,7 @@
         </p:nvSpPr>
         <p:spPr>
           <a:xfrm>
-            <a:off x="2555025" y="72350"/>
+            <a:off x="2631225" y="-80050"/>
             <a:ext cx="2539200" cy="942000"/>
           </a:xfrm>
           <a:prstGeom prst="rect">
@@ -12158,7 +12278,7 @@
         </p:nvSpPr>
         <p:spPr>
           <a:xfrm>
-            <a:off x="5857600" y="183050"/>
+            <a:off x="5705200" y="30650"/>
             <a:ext cx="3119700" cy="831300"/>
           </a:xfrm>
           <a:prstGeom prst="rect">
@@ -12237,7 +12357,7 @@
   <p:cSld>
     <p:spTree>
       <p:nvGrpSpPr>
-        <p:cNvPr id="1" name="Shape 185"/>
+        <p:cNvPr id="1" name="Shape 186"/>
         <p:cNvGrpSpPr/>
         <p:nvPr/>
       </p:nvGrpSpPr>
@@ -12251,7 +12371,7 @@
       </p:grpSpPr>
       <p:sp>
         <p:nvSpPr>
-          <p:cNvPr id="186" name="Google Shape;186;p23"/>
+          <p:cNvPr id="187" name="Google Shape;187;p23"/>
           <p:cNvSpPr txBox="1"/>
           <p:nvPr/>
         </p:nvSpPr>
@@ -12298,7 +12418,7 @@
                 <a:cs typeface="Calibri"/>
                 <a:sym typeface="Calibri"/>
               </a:rPr>
-              <a:t>pdfplumber</a:t>
+              <a:t>Misc 5</a:t>
             </a:r>
             <a:endParaRPr sz="2000" b="1">
               <a:solidFill>
@@ -12314,7 +12434,7 @@
       </p:sp>
       <p:sp>
         <p:nvSpPr>
-          <p:cNvPr id="187" name="Google Shape;187;p23"/>
+          <p:cNvPr id="188" name="Google Shape;188;p23"/>
           <p:cNvSpPr txBox="1"/>
           <p:nvPr/>
         </p:nvSpPr>
@@ -12785,7 +12905,7 @@
       </p:sp>
       <p:sp>
         <p:nvSpPr>
-          <p:cNvPr id="188" name="Google Shape;188;p23"/>
+          <p:cNvPr id="189" name="Google Shape;189;p23"/>
           <p:cNvSpPr txBox="1"/>
           <p:nvPr/>
         </p:nvSpPr>
@@ -13270,6 +13390,149 @@
           </a:p>
         </p:txBody>
       </p:sp>
+      <p:sp>
+        <p:nvSpPr>
+          <p:cNvPr id="190" name="Google Shape;190;p23"/>
+          <p:cNvSpPr txBox="1"/>
+          <p:nvPr/>
+        </p:nvSpPr>
+        <p:spPr>
+          <a:xfrm>
+            <a:off x="4623050" y="410700"/>
+            <a:ext cx="4410600" cy="957300"/>
+          </a:xfrm>
+          <a:prstGeom prst="rect">
+            <a:avLst/>
+          </a:prstGeom>
+          <a:solidFill>
+            <a:srgbClr val="FFF2CC"/>
+          </a:solidFill>
+          <a:ln w="9525" cap="flat" cmpd="sng">
+            <a:solidFill>
+              <a:srgbClr val="FF0000"/>
+            </a:solidFill>
+            <a:prstDash val="solid"/>
+            <a:round/>
+            <a:headEnd type="none" w="sm" len="sm"/>
+            <a:tailEnd type="none" w="sm" len="sm"/>
+          </a:ln>
+        </p:spPr>
+        <p:txBody>
+          <a:bodyPr spcFirstLastPara="1" wrap="square" lIns="9125" tIns="9125" rIns="9125" bIns="9125" anchor="t" anchorCtr="0">
+            <a:spAutoFit/>
+          </a:bodyPr>
+          <a:lstStyle/>
+          <a:p>
+            <a:pPr marL="0" lvl="0" indent="0" algn="l" rtl="0">
+              <a:spcBef>
+                <a:spcPts val="0"/>
+              </a:spcBef>
+              <a:spcAft>
+                <a:spcPts val="0"/>
+              </a:spcAft>
+              <a:buNone/>
+            </a:pPr>
+            <a:r>
+              <a:rPr lang="en" sz="1300" b="1">
+                <a:solidFill>
+                  <a:srgbClr val="FF0000"/>
+                </a:solidFill>
+                <a:latin typeface="Calibri"/>
+                <a:ea typeface="Calibri"/>
+                <a:cs typeface="Calibri"/>
+                <a:sym typeface="Calibri"/>
+              </a:rPr>
+              <a:t>Don't use LangChain</a:t>
+            </a:r>
+            <a:endParaRPr sz="1300" b="1">
+              <a:solidFill>
+                <a:srgbClr val="FF0000"/>
+              </a:solidFill>
+              <a:latin typeface="Calibri"/>
+              <a:ea typeface="Calibri"/>
+              <a:cs typeface="Calibri"/>
+              <a:sym typeface="Calibri"/>
+            </a:endParaRPr>
+          </a:p>
+          <a:p>
+            <a:pPr marL="0" lvl="0" indent="0" algn="l" rtl="0">
+              <a:spcBef>
+                <a:spcPts val="0"/>
+              </a:spcBef>
+              <a:spcAft>
+                <a:spcPts val="0"/>
+              </a:spcAft>
+              <a:buNone/>
+            </a:pPr>
+            <a:r>
+              <a:rPr lang="en" sz="1300">
+                <a:solidFill>
+                  <a:schemeClr val="dk1"/>
+                </a:solidFill>
+                <a:latin typeface="Calibri"/>
+                <a:ea typeface="Calibri"/>
+                <a:cs typeface="Calibri"/>
+                <a:sym typeface="Calibri"/>
+              </a:rPr>
+              <a:t>It uses abstractions on top of abstractions and actually makes your code needlessly complicated. Just write API calls and add a vector database instead.</a:t>
+            </a:r>
+            <a:endParaRPr sz="1300">
+              <a:solidFill>
+                <a:schemeClr val="dk1"/>
+              </a:solidFill>
+              <a:latin typeface="Calibri"/>
+              <a:ea typeface="Calibri"/>
+              <a:cs typeface="Calibri"/>
+              <a:sym typeface="Calibri"/>
+            </a:endParaRPr>
+          </a:p>
+          <a:p>
+            <a:pPr marL="0" lvl="0" indent="0" algn="l" rtl="0">
+              <a:spcBef>
+                <a:spcPts val="0"/>
+              </a:spcBef>
+              <a:spcAft>
+                <a:spcPts val="0"/>
+              </a:spcAft>
+              <a:buNone/>
+            </a:pPr>
+            <a:r>
+              <a:rPr lang="en" sz="900" u="sng">
+                <a:solidFill>
+                  <a:schemeClr val="hlink"/>
+                </a:solidFill>
+                <a:latin typeface="Calibri"/>
+                <a:ea typeface="Calibri"/>
+                <a:cs typeface="Calibri"/>
+                <a:sym typeface="Calibri"/>
+                <a:hlinkClick r:id="rId4"/>
+              </a:rPr>
+              <a:t>https://twitter.com/levelsio/status/1804078191385956668</a:t>
+            </a:r>
+            <a:r>
+              <a:rPr lang="en" sz="900">
+                <a:solidFill>
+                  <a:schemeClr val="dk1"/>
+                </a:solidFill>
+                <a:latin typeface="Calibri"/>
+                <a:ea typeface="Calibri"/>
+                <a:cs typeface="Calibri"/>
+                <a:sym typeface="Calibri"/>
+              </a:rPr>
+              <a:t> </a:t>
+            </a:r>
+            <a:endParaRPr sz="900">
+              <a:solidFill>
+                <a:schemeClr val="dk1"/>
+              </a:solidFill>
+              <a:latin typeface="Calibri"/>
+              <a:ea typeface="Calibri"/>
+              <a:cs typeface="Calibri"/>
+              <a:sym typeface="Calibri"/>
+            </a:endParaRPr>
+          </a:p>
+        </p:txBody>
+      </p:sp>
     </p:spTree>
   </p:cSld>
   <p:clrMapOvr>
@@ -13283,7 +13546,7 @@
   <p:cSld>
     <p:spTree>
       <p:nvGrpSpPr>
-        <p:cNvPr id="1" name="Shape 192"/>
+        <p:cNvPr id="1" name="Shape 194"/>
         <p:cNvGrpSpPr/>
         <p:nvPr/>
       </p:nvGrpSpPr>
@@ -13297,7 +13560,7 @@
       </p:grpSpPr>
       <p:sp>
         <p:nvSpPr>
-          <p:cNvPr id="193" name="Google Shape;193;p24"/>
+          <p:cNvPr id="195" name="Google Shape;195;p24"/>
           <p:cNvSpPr txBox="1"/>
           <p:nvPr/>
         </p:nvSpPr>
@@ -13360,7 +13623,7 @@
       </p:sp>
       <p:sp>
         <p:nvSpPr>
-          <p:cNvPr id="194" name="Google Shape;194;p24"/>
+          <p:cNvPr id="196" name="Google Shape;196;p24"/>
           <p:cNvSpPr txBox="1"/>
           <p:nvPr/>
         </p:nvSpPr>
@@ -13558,7 +13821,7 @@
       </p:sp>
       <p:pic>
         <p:nvPicPr>
-          <p:cNvPr id="195" name="Google Shape;195;p24"/>
+          <p:cNvPr id="197" name="Google Shape;197;p24"/>
           <p:cNvPicPr preferRelativeResize="0"/>
           <p:nvPr/>
         </p:nvPicPr>
@@ -13591,7 +13854,7 @@
       </p:pic>
       <p:pic>
         <p:nvPicPr>
-          <p:cNvPr id="196" name="Google Shape;196;p24"/>
+          <p:cNvPr id="198" name="Google Shape;198;p24"/>
           <p:cNvPicPr preferRelativeResize="0"/>
           <p:nvPr/>
         </p:nvPicPr>
@@ -13634,7 +13897,7 @@
   <p:cSld>
     <p:spTree>
       <p:nvGrpSpPr>
-        <p:cNvPr id="1" name="Shape 200"/>
+        <p:cNvPr id="1" name="Shape 202"/>
         <p:cNvGrpSpPr/>
         <p:nvPr/>
       </p:nvGrpSpPr>
@@ -13648,7 +13911,7 @@
       </p:grpSpPr>
       <p:sp>
         <p:nvSpPr>
-          <p:cNvPr id="201" name="Google Shape;201;p25"/>
+          <p:cNvPr id="203" name="Google Shape;203;p25"/>
           <p:cNvSpPr txBox="1"/>
           <p:nvPr/>
         </p:nvSpPr>
@@ -13711,7 +13974,7 @@
       </p:sp>
       <p:sp>
         <p:nvSpPr>
-          <p:cNvPr id="202" name="Google Shape;202;p25"/>
+          <p:cNvPr id="204" name="Google Shape;204;p25"/>
           <p:cNvSpPr txBox="1"/>
           <p:nvPr/>
         </p:nvSpPr>
@@ -14495,7 +14758,7 @@
       </p:sp>
       <p:pic>
         <p:nvPicPr>
-          <p:cNvPr id="203" name="Google Shape;203;p25"/>
+          <p:cNvPr id="205" name="Google Shape;205;p25"/>
           <p:cNvPicPr preferRelativeResize="0"/>
           <p:nvPr/>
         </p:nvPicPr>
@@ -14534,7 +14797,7 @@
       </p:pic>
       <p:sp>
         <p:nvSpPr>
-          <p:cNvPr id="204" name="Google Shape;204;p25"/>
+          <p:cNvPr id="206" name="Google Shape;206;p25"/>
           <p:cNvSpPr txBox="1"/>
           <p:nvPr/>
         </p:nvSpPr>
@@ -14634,7 +14897,7 @@
       </p:sp>
       <p:sp>
         <p:nvSpPr>
-          <p:cNvPr id="205" name="Google Shape;205;p25"/>
+          <p:cNvPr id="207" name="Google Shape;207;p25"/>
           <p:cNvSpPr txBox="1"/>
           <p:nvPr/>
         </p:nvSpPr>
@@ -14716,7 +14979,7 @@
   <p:cSld>
     <p:spTree>
       <p:nvGrpSpPr>
-        <p:cNvPr id="1" name="Shape 209"/>
+        <p:cNvPr id="1" name="Shape 211"/>
         <p:cNvGrpSpPr/>
         <p:nvPr/>
       </p:nvGrpSpPr>
@@ -14730,7 +14993,7 @@
       </p:grpSpPr>
       <p:pic>
         <p:nvPicPr>
-          <p:cNvPr id="210" name="Google Shape;210;p26"/>
+          <p:cNvPr id="212" name="Google Shape;212;p26"/>
           <p:cNvPicPr preferRelativeResize="0"/>
           <p:nvPr/>
         </p:nvPicPr>
@@ -14763,7 +15026,7 @@
       </p:pic>
       <p:sp>
         <p:nvSpPr>
-          <p:cNvPr id="211" name="Google Shape;211;p26"/>
+          <p:cNvPr id="213" name="Google Shape;213;p26"/>
           <p:cNvSpPr txBox="1"/>
           <p:nvPr/>
         </p:nvSpPr>
@@ -14853,7 +15116,7 @@
       </p:sp>
       <p:sp>
         <p:nvSpPr>
-          <p:cNvPr id="212" name="Google Shape;212;p26"/>
+          <p:cNvPr id="214" name="Google Shape;214;p26"/>
           <p:cNvSpPr txBox="1"/>
           <p:nvPr/>
         </p:nvSpPr>
@@ -14944,7 +15207,7 @@
       </p:sp>
       <p:sp>
         <p:nvSpPr>
-          <p:cNvPr id="213" name="Google Shape;213;p26"/>
+          <p:cNvPr id="215" name="Google Shape;215;p26"/>
           <p:cNvSpPr txBox="1"/>
           <p:nvPr/>
         </p:nvSpPr>
@@ -15116,7 +15379,7 @@
       </p:sp>
       <p:sp>
         <p:nvSpPr>
-          <p:cNvPr id="214" name="Google Shape;214;p26"/>
+          <p:cNvPr id="216" name="Google Shape;216;p26"/>
           <p:cNvSpPr/>
           <p:nvPr/>
         </p:nvSpPr>
@@ -15160,7 +15423,7 @@
       </p:sp>
       <p:sp>
         <p:nvSpPr>
-          <p:cNvPr id="215" name="Google Shape;215;p26"/>
+          <p:cNvPr id="217" name="Google Shape;217;p26"/>
           <p:cNvSpPr/>
           <p:nvPr/>
         </p:nvSpPr>
@@ -15215,7 +15478,7 @@
   <p:cSld>
     <p:spTree>
       <p:nvGrpSpPr>
-        <p:cNvPr id="1" name="Shape 219"/>
+        <p:cNvPr id="1" name="Shape 221"/>
         <p:cNvGrpSpPr/>
         <p:nvPr/>
       </p:nvGrpSpPr>
@@ -15229,7 +15492,7 @@
       </p:grpSpPr>
       <p:pic>
         <p:nvPicPr>
-          <p:cNvPr id="220" name="Google Shape;220;p27"/>
+          <p:cNvPr id="222" name="Google Shape;222;p27"/>
           <p:cNvPicPr preferRelativeResize="0"/>
           <p:nvPr/>
         </p:nvPicPr>
@@ -15256,7 +15519,7 @@
       </p:pic>
       <p:sp>
         <p:nvSpPr>
-          <p:cNvPr id="221" name="Google Shape;221;p27"/>
+          <p:cNvPr id="223" name="Google Shape;223;p27"/>
           <p:cNvSpPr txBox="1"/>
           <p:nvPr/>
         </p:nvSpPr>
@@ -15322,7 +15585,7 @@
       </p:sp>
       <p:sp>
         <p:nvSpPr>
-          <p:cNvPr id="222" name="Google Shape;222;p27"/>
+          <p:cNvPr id="224" name="Google Shape;224;p27"/>
           <p:cNvSpPr txBox="1"/>
           <p:nvPr/>
         </p:nvSpPr>
@@ -15752,7 +16015,7 @@
       </p:sp>
       <p:pic>
         <p:nvPicPr>
-          <p:cNvPr id="223" name="Google Shape;223;p27"/>
+          <p:cNvPr id="225" name="Google Shape;225;p27"/>
           <p:cNvPicPr preferRelativeResize="0"/>
           <p:nvPr/>
         </p:nvPicPr>
@@ -15784,7 +16047,7 @@
       </p:pic>
       <p:sp>
         <p:nvSpPr>
-          <p:cNvPr id="224" name="Google Shape;224;p27"/>
+          <p:cNvPr id="226" name="Google Shape;226;p27"/>
           <p:cNvSpPr txBox="1"/>
           <p:nvPr/>
         </p:nvSpPr>
@@ -15863,7 +16126,7 @@
       </p:sp>
       <p:sp>
         <p:nvSpPr>
-          <p:cNvPr id="225" name="Google Shape;225;p27"/>
+          <p:cNvPr id="227" name="Google Shape;227;p27"/>
           <p:cNvSpPr txBox="1"/>
           <p:nvPr/>
         </p:nvSpPr>
@@ -15940,7 +16203,7 @@
   <p:cSld>
     <p:spTree>
       <p:nvGrpSpPr>
-        <p:cNvPr id="1" name="Shape 229"/>
+        <p:cNvPr id="1" name="Shape 231"/>
         <p:cNvGrpSpPr/>
         <p:nvPr/>
       </p:nvGrpSpPr>
@@ -15954,7 +16217,7 @@
       </p:grpSpPr>
       <p:sp>
         <p:nvSpPr>
-          <p:cNvPr id="230" name="Google Shape;230;p28"/>
+          <p:cNvPr id="232" name="Google Shape;232;p28"/>
           <p:cNvSpPr txBox="1"/>
           <p:nvPr/>
         </p:nvSpPr>
@@ -20957,7 +21220,7 @@
         <p:spPr>
           <a:xfrm>
             <a:off x="76200" y="867900"/>
-            <a:ext cx="4224000" cy="957300"/>
+            <a:ext cx="4224000" cy="1095900"/>
           </a:xfrm>
           <a:prstGeom prst="rect">
             <a:avLst/>
@@ -21120,6 +21383,51 @@
                 <a:sym typeface="Calibri"/>
                 <a:hlinkClick r:id="rId4"/>
               </a:rPr>
+              <a:t>https://arxiv.org/abs/2406.02528</a:t>
+            </a:r>
+            <a:r>
+              <a:rPr lang="en" sz="900">
+                <a:solidFill>
+                  <a:schemeClr val="dk1"/>
+                </a:solidFill>
+                <a:latin typeface="Calibri"/>
+                <a:ea typeface="Calibri"/>
+                <a:cs typeface="Calibri"/>
+                <a:sym typeface="Calibri"/>
+              </a:rPr>
+              <a:t> </a:t>
+            </a:r>
+            <a:endParaRPr sz="900">
+              <a:solidFill>
+                <a:schemeClr val="dk1"/>
+              </a:solidFill>
+              <a:latin typeface="Calibri"/>
+              <a:ea typeface="Calibri"/>
+              <a:cs typeface="Calibri"/>
+              <a:sym typeface="Calibri"/>
+            </a:endParaRPr>
+          </a:p>
+          <a:p>
+            <a:pPr marL="0" lvl="0" indent="0" algn="l" rtl="0">
+              <a:spcBef>
+                <a:spcPts val="0"/>
+              </a:spcBef>
+              <a:spcAft>
+                <a:spcPts val="0"/>
+              </a:spcAft>
+              <a:buNone/>
+            </a:pPr>
+            <a:r>
+              <a:rPr lang="en" sz="900" u="sng">
+                <a:solidFill>
+                  <a:schemeClr val="hlink"/>
+                </a:solidFill>
+                <a:latin typeface="Calibri"/>
+                <a:ea typeface="Calibri"/>
+                <a:cs typeface="Calibri"/>
+                <a:sym typeface="Calibri"/>
+                <a:hlinkClick r:id="rId5"/>
+              </a:rPr>
               <a:t>https://www.santacruzworks.org/news/revolutionizing-energy-in-large-language-models</a:t>
             </a:r>
             <a:r>
@@ -21134,7 +21442,7 @@
               </a:rPr>
               <a:t> </a:t>
             </a:r>
-            <a:endParaRPr sz="500">
+            <a:endParaRPr sz="900">
               <a:solidFill>
                 <a:schemeClr val="dk1"/>
               </a:solidFill>
@@ -21154,7 +21462,7 @@
         </p:nvSpPr>
         <p:spPr>
           <a:xfrm>
-            <a:off x="76200" y="1925400"/>
+            <a:off x="76200" y="2049981"/>
             <a:ext cx="4437900" cy="1896300"/>
           </a:xfrm>
           <a:prstGeom prst="rect">
@@ -21449,7 +21757,7 @@
                 <a:ea typeface="Calibri"/>
                 <a:cs typeface="Calibri"/>
                 <a:sym typeface="Calibri"/>
-                <a:hlinkClick r:id="rId5"/>
+                <a:hlinkClick r:id="rId6"/>
               </a:rPr>
               <a:t>https://cloud.google.com/blog/products/ai-machine-learning/vertex-ai-offers-enterprise-ready-generative-ai</a:t>
             </a:r>
@@ -21472,7 +21780,7 @@
           <p:nvPr/>
         </p:nvPicPr>
         <p:blipFill>
-          <a:blip r:embed="rId6" cstate="email">
+          <a:blip r:embed="rId7" cstate="email">
             <a:alphaModFix/>
             <a:extLst>
               <a:ext uri="{28A0092B-C50C-407E-A947-70E740481C1C}">
@@ -21511,7 +21819,7 @@
           <p:nvPr/>
         </p:nvPicPr>
         <p:blipFill rotWithShape="1">
-          <a:blip r:embed="rId7" cstate="email">
+          <a:blip r:embed="rId8" cstate="email">
             <a:alphaModFix/>
             <a:extLst>
               <a:ext uri="{28A0092B-C50C-407E-A947-70E740481C1C}">
@@ -21550,7 +21858,7 @@
         </p:nvSpPr>
         <p:spPr>
           <a:xfrm>
-            <a:off x="76200" y="3971200"/>
+            <a:off x="76200" y="4047400"/>
             <a:ext cx="4437900" cy="1018800"/>
           </a:xfrm>
           <a:prstGeom prst="rect">
@@ -21647,7 +21955,7 @@
           <p:nvPr/>
         </p:nvPicPr>
         <p:blipFill>
-          <a:blip r:embed="rId8" cstate="email">
+          <a:blip r:embed="rId9" cstate="email">
             <a:alphaModFix/>
             <a:extLst>
               <a:ext uri="{28A0092B-C50C-407E-A947-70E740481C1C}">
@@ -21661,7 +21969,7 @@
         </p:blipFill>
         <p:spPr>
           <a:xfrm>
-            <a:off x="4683075" y="3971200"/>
+            <a:off x="4626227" y="4047400"/>
             <a:ext cx="2037600" cy="1018800"/>
           </a:xfrm>
           <a:prstGeom prst="rect">
@@ -21776,7 +22084,7 @@
                 <a:ea typeface="Calibri"/>
                 <a:cs typeface="Calibri"/>
                 <a:sym typeface="Calibri"/>
-                <a:hlinkClick r:id="rId9"/>
+                <a:hlinkClick r:id="rId10"/>
               </a:rPr>
               <a:t>https://twitter.com/OpenAI/status/1805679342439284831</a:t>
             </a:r>
@@ -21811,7 +22119,7 @@
                 <a:ea typeface="Calibri"/>
                 <a:cs typeface="Calibri"/>
                 <a:sym typeface="Calibri"/>
-                <a:hlinkClick r:id="rId10"/>
+                <a:hlinkClick r:id="rId11"/>
               </a:rPr>
               <a:t>https://openai.com/chatgpt/mac/</a:t>
             </a:r>
@@ -21846,7 +22154,7 @@
           <p:nvPr/>
         </p:nvPicPr>
         <p:blipFill>
-          <a:blip r:embed="rId11" cstate="email">
+          <a:blip r:embed="rId12" cstate="email">
             <a:alphaModFix/>
             <a:extLst>
               <a:ext uri="{28A0092B-C50C-407E-A947-70E740481C1C}">
@@ -22605,7 +22913,7 @@
         </p:nvSpPr>
         <p:spPr>
           <a:xfrm>
-            <a:off x="4614125" y="410700"/>
+            <a:off x="4614125" y="105900"/>
             <a:ext cx="4436100" cy="1173000"/>
           </a:xfrm>
           <a:prstGeom prst="rect">
@@ -22815,7 +23123,7 @@
         </p:nvSpPr>
         <p:spPr>
           <a:xfrm>
-            <a:off x="4614125" y="1655908"/>
+            <a:off x="4614125" y="1351108"/>
             <a:ext cx="3614700" cy="418500"/>
           </a:xfrm>
           <a:prstGeom prst="rect">
@@ -22912,7 +23220,7 @@
         </p:blipFill>
         <p:spPr>
           <a:xfrm>
-            <a:off x="8301000" y="1638900"/>
+            <a:off x="8301000" y="1334100"/>
             <a:ext cx="749225" cy="889300"/>
           </a:xfrm>
           <a:prstGeom prst="rect">
@@ -22932,7 +23240,7 @@
         </p:nvSpPr>
         <p:spPr>
           <a:xfrm>
-            <a:off x="4599300" y="2146608"/>
+            <a:off x="4599300" y="1841808"/>
             <a:ext cx="3614700" cy="526500"/>
           </a:xfrm>
           <a:prstGeom prst="rect">
@@ -23086,7 +23394,7 @@
         </p:blipFill>
         <p:spPr>
           <a:xfrm>
-            <a:off x="4614124" y="2745301"/>
+            <a:off x="4614124" y="2440501"/>
             <a:ext cx="1898550" cy="1898550"/>
           </a:xfrm>
           <a:prstGeom prst="rect">
@@ -23289,7 +23597,7 @@
         </p:nvSpPr>
         <p:spPr>
           <a:xfrm>
-            <a:off x="6614500" y="2726000"/>
+            <a:off x="6614500" y="2421200"/>
             <a:ext cx="2435700" cy="1157400"/>
           </a:xfrm>
           <a:prstGeom prst="rect">
@@ -23443,7 +23751,7 @@
         </p:blipFill>
         <p:spPr>
           <a:xfrm>
-            <a:off x="8113800" y="3942998"/>
+            <a:off x="8113800" y="3638198"/>
             <a:ext cx="936400" cy="1104375"/>
           </a:xfrm>
           <a:prstGeom prst="rect">
@@ -23455,6 +23763,99 @@
           </a:ln>
         </p:spPr>
       </p:pic>
+      <p:sp>
+        <p:nvSpPr>
+          <p:cNvPr id="169" name="Google Shape;169;p21"/>
+          <p:cNvSpPr txBox="1"/>
+          <p:nvPr/>
+        </p:nvSpPr>
+        <p:spPr>
+          <a:xfrm>
+            <a:off x="4614125" y="4411250"/>
+            <a:ext cx="2923500" cy="618600"/>
+          </a:xfrm>
+          <a:prstGeom prst="rect">
+            <a:avLst/>
+          </a:prstGeom>
+          <a:solidFill>
+            <a:srgbClr val="FFF2CC"/>
+          </a:solidFill>
+          <a:ln w="9525" cap="flat" cmpd="sng">
+            <a:solidFill>
+              <a:srgbClr val="FF0000"/>
+            </a:solidFill>
+            <a:prstDash val="solid"/>
+            <a:round/>
+            <a:headEnd type="none" w="sm" len="sm"/>
+            <a:tailEnd type="none" w="sm" len="sm"/>
+          </a:ln>
+        </p:spPr>
+        <p:txBody>
+          <a:bodyPr spcFirstLastPara="1" wrap="square" lIns="9125" tIns="9125" rIns="9125" bIns="9125" anchor="t" anchorCtr="0">
+            <a:spAutoFit/>
+          </a:bodyPr>
+          <a:lstStyle/>
+          <a:p>
+            <a:pPr marL="0" lvl="0" indent="0" algn="l" rtl="0">
+              <a:spcBef>
+                <a:spcPts val="0"/>
+              </a:spcBef>
+              <a:spcAft>
+                <a:spcPts val="0"/>
+              </a:spcAft>
+              <a:buNone/>
+            </a:pPr>
+            <a:r>
+              <a:rPr lang="en" sz="1300" b="1">
+                <a:solidFill>
+                  <a:srgbClr val="3C78D8"/>
+                </a:solidFill>
+                <a:latin typeface="Calibri"/>
+                <a:ea typeface="Calibri"/>
+                <a:cs typeface="Calibri"/>
+                <a:sym typeface="Calibri"/>
+              </a:rPr>
+              <a:t>Apple &amp; Microsoft</a:t>
+            </a:r>
+            <a:r>
+              <a:rPr lang="en" sz="1300">
+                <a:latin typeface="Calibri"/>
+                <a:ea typeface="Calibri"/>
+                <a:cs typeface="Calibri"/>
+                <a:sym typeface="Calibri"/>
+              </a:rPr>
+              <a:t> move towards efficient </a:t>
+            </a:r>
+            <a:r>
+              <a:rPr lang="en" sz="1300" b="1">
+                <a:solidFill>
+                  <a:srgbClr val="FF0000"/>
+                </a:solidFill>
+                <a:latin typeface="Calibri"/>
+                <a:ea typeface="Calibri"/>
+                <a:cs typeface="Calibri"/>
+                <a:sym typeface="Calibri"/>
+              </a:rPr>
+              <a:t>Small Language Models (SML)</a:t>
+            </a:r>
+            <a:r>
+              <a:rPr lang="en" sz="1300">
+                <a:latin typeface="Calibri"/>
+                <a:ea typeface="Calibri"/>
+                <a:cs typeface="Calibri"/>
+                <a:sym typeface="Calibri"/>
+              </a:rPr>
+              <a:t> for local on-device operation</a:t>
+            </a:r>
+            <a:endParaRPr sz="1300">
+              <a:latin typeface="Calibri"/>
+              <a:ea typeface="Calibri"/>
+              <a:cs typeface="Calibri"/>
+              <a:sym typeface="Calibri"/>
+            </a:endParaRPr>
+          </a:p>
+        </p:txBody>
+      </p:sp>
     </p:spTree>
   </p:cSld>
   <p:clrMapOvr>
@@ -23468,7 +23869,7 @@
   <p:cSld>
     <p:spTree>
       <p:nvGrpSpPr>
-        <p:cNvPr id="1" name="Shape 172"/>
+        <p:cNvPr id="1" name="Shape 173"/>
         <p:cNvGrpSpPr/>
         <p:nvPr/>
       </p:nvGrpSpPr>
@@ -23482,7 +23883,7 @@
       </p:grpSpPr>
       <p:sp>
         <p:nvSpPr>
-          <p:cNvPr id="173" name="Google Shape;173;p22"/>
+          <p:cNvPr id="174" name="Google Shape;174;p22"/>
           <p:cNvSpPr txBox="1"/>
           <p:nvPr/>
         </p:nvSpPr>
@@ -23545,7 +23946,7 @@
       </p:sp>
       <p:sp>
         <p:nvSpPr>
-          <p:cNvPr id="174" name="Google Shape;174;p22"/>
+          <p:cNvPr id="175" name="Google Shape;175;p22"/>
           <p:cNvSpPr txBox="1"/>
           <p:nvPr/>
         </p:nvSpPr>
@@ -23766,7 +24167,7 @@
       </p:sp>
       <p:pic>
         <p:nvPicPr>
-          <p:cNvPr id="175" name="Google Shape;175;p22"/>
+          <p:cNvPr id="176" name="Google Shape;176;p22"/>
           <p:cNvPicPr preferRelativeResize="0"/>
           <p:nvPr/>
         </p:nvPicPr>
@@ -23799,7 +24200,7 @@
       </p:pic>
       <p:sp>
         <p:nvSpPr>
-          <p:cNvPr id="176" name="Google Shape;176;p22"/>
+          <p:cNvPr id="177" name="Google Shape;177;p22"/>
           <p:cNvSpPr txBox="1"/>
           <p:nvPr/>
         </p:nvSpPr>
@@ -23865,7 +24266,7 @@
       </p:sp>
       <p:sp>
         <p:nvSpPr>
-          <p:cNvPr id="177" name="Google Shape;177;p22"/>
+          <p:cNvPr id="178" name="Google Shape;178;p22"/>
           <p:cNvSpPr txBox="1"/>
           <p:nvPr/>
         </p:nvSpPr>
@@ -23931,7 +24332,7 @@
       </p:sp>
       <p:sp>
         <p:nvSpPr>
-          <p:cNvPr id="178" name="Google Shape;178;p22"/>
+          <p:cNvPr id="179" name="Google Shape;179;p22"/>
           <p:cNvSpPr txBox="1"/>
           <p:nvPr/>
         </p:nvSpPr>
@@ -23997,7 +24398,7 @@
       </p:sp>
       <p:sp>
         <p:nvSpPr>
-          <p:cNvPr id="179" name="Google Shape;179;p22"/>
+          <p:cNvPr id="180" name="Google Shape;180;p22"/>
           <p:cNvSpPr txBox="1"/>
           <p:nvPr/>
         </p:nvSpPr>
@@ -24063,7 +24464,7 @@
       </p:sp>
       <p:pic>
         <p:nvPicPr>
-          <p:cNvPr id="180" name="Google Shape;180;p22"/>
+          <p:cNvPr id="181" name="Google Shape;181;p22"/>
           <p:cNvPicPr preferRelativeResize="0"/>
           <p:nvPr/>
         </p:nvPicPr>
@@ -24091,7 +24492,7 @@
       </p:pic>
       <p:pic>
         <p:nvPicPr>
-          <p:cNvPr id="181" name="Google Shape;181;p22"/>
+          <p:cNvPr id="182" name="Google Shape;182;p22"/>
           <p:cNvPicPr preferRelativeResize="0"/>
           <p:nvPr/>
         </p:nvPicPr>
